--- a/proposals/機種分析/バイオハザード5/biohazard5_guide_v1.pptx
+++ b/proposals/機種分析/バイオハザード5/biohazard5_guide_v1.pptx
@@ -3993,8 +3993,8 @@
         </p:nvSpPr>
         <p:spPr>
           <a:xfrm>
-            <a:off x="5166360" y="502920"/>
-            <a:ext cx="3749039" cy="1188720"/>
+            <a:off x="5166360" y="365760"/>
+            <a:ext cx="3749039" cy="1143000"/>
           </a:xfrm>
           <a:prstGeom prst="rect">
             <a:avLst/>
@@ -4038,8 +4038,8 @@
         </p:nvSpPr>
         <p:spPr>
           <a:xfrm>
-            <a:off x="5166360" y="502920"/>
-            <a:ext cx="60000" cy="1188720"/>
+            <a:off x="5166360" y="365760"/>
+            <a:ext cx="60000" cy="1143000"/>
           </a:xfrm>
           <a:prstGeom prst="rect">
             <a:avLst/>
@@ -4081,8 +4081,8 @@
         </p:nvSpPr>
         <p:spPr>
           <a:xfrm>
-            <a:off x="5349240" y="567920"/>
-            <a:ext cx="3474720" cy="310000"/>
+            <a:off x="5349240" y="420760"/>
+            <a:ext cx="3474720" cy="290000"/>
           </a:xfrm>
           <a:prstGeom prst="rect">
             <a:avLst/>
@@ -4116,8 +4116,8 @@
         </p:nvSpPr>
         <p:spPr>
           <a:xfrm>
-            <a:off x="5349240" y="882920"/>
-            <a:ext cx="3474720" cy="450000"/>
+            <a:off x="5349240" y="715760"/>
+            <a:ext cx="3474720" cy="430000"/>
           </a:xfrm>
           <a:prstGeom prst="rect">
             <a:avLst/>
@@ -4153,8 +4153,8 @@
         </p:nvSpPr>
         <p:spPr>
           <a:xfrm>
-            <a:off x="5166360" y="2042920"/>
-            <a:ext cx="3749039" cy="1188720"/>
+            <a:off x="5166360" y="1855760"/>
+            <a:ext cx="3749039" cy="1143000"/>
           </a:xfrm>
           <a:prstGeom prst="rect">
             <a:avLst/>
@@ -4198,8 +4198,8 @@
         </p:nvSpPr>
         <p:spPr>
           <a:xfrm>
-            <a:off x="5166360" y="2042920"/>
-            <a:ext cx="60000" cy="1188720"/>
+            <a:off x="5166360" y="1855760"/>
+            <a:ext cx="60000" cy="1143000"/>
           </a:xfrm>
           <a:prstGeom prst="rect">
             <a:avLst/>
@@ -4241,8 +4241,8 @@
         </p:nvSpPr>
         <p:spPr>
           <a:xfrm>
-            <a:off x="5349240" y="2107920"/>
-            <a:ext cx="3474720" cy="310000"/>
+            <a:off x="5349240" y="1910760"/>
+            <a:ext cx="3474720" cy="290000"/>
           </a:xfrm>
           <a:prstGeom prst="rect">
             <a:avLst/>
@@ -4276,8 +4276,8 @@
         </p:nvSpPr>
         <p:spPr>
           <a:xfrm>
-            <a:off x="5349240" y="2422920"/>
-            <a:ext cx="3474720" cy="450000"/>
+            <a:off x="5349240" y="2205760"/>
+            <a:ext cx="3474720" cy="430000"/>
           </a:xfrm>
           <a:prstGeom prst="rect">
             <a:avLst/>
@@ -4313,8 +4313,8 @@
         </p:nvSpPr>
         <p:spPr>
           <a:xfrm>
-            <a:off x="5166360" y="3582920"/>
-            <a:ext cx="3749039" cy="1188720"/>
+            <a:off x="5166360" y="3345760"/>
+            <a:ext cx="3749039" cy="1143000"/>
           </a:xfrm>
           <a:prstGeom prst="rect">
             <a:avLst/>
@@ -4358,8 +4358,8 @@
         </p:nvSpPr>
         <p:spPr>
           <a:xfrm>
-            <a:off x="5166360" y="3582920"/>
-            <a:ext cx="60000" cy="1188720"/>
+            <a:off x="5166360" y="3345760"/>
+            <a:ext cx="60000" cy="1143000"/>
           </a:xfrm>
           <a:prstGeom prst="rect">
             <a:avLst/>
@@ -4401,8 +4401,8 @@
         </p:nvSpPr>
         <p:spPr>
           <a:xfrm>
-            <a:off x="5349240" y="3647920"/>
-            <a:ext cx="3474720" cy="310000"/>
+            <a:off x="5349240" y="3400760"/>
+            <a:ext cx="3474720" cy="290000"/>
           </a:xfrm>
           <a:prstGeom prst="rect">
             <a:avLst/>
@@ -4436,8 +4436,8 @@
         </p:nvSpPr>
         <p:spPr>
           <a:xfrm>
-            <a:off x="5349240" y="3962920"/>
-            <a:ext cx="3474720" cy="450000"/>
+            <a:off x="5349240" y="3695760"/>
+            <a:ext cx="3474720" cy="430000"/>
           </a:xfrm>
           <a:prstGeom prst="rect">
             <a:avLst/>
@@ -6420,7 +6420,7 @@
         <p:spPr>
           <a:xfrm>
             <a:off x="8193024" y="1993392"/>
-            <a:ext cx="1417320" cy="1080000"/>
+            <a:ext cx="860976" cy="1080000"/>
           </a:xfrm>
           <a:prstGeom prst="rect">
             <a:avLst/>
@@ -6508,7 +6508,7 @@
         <p:spPr>
           <a:xfrm>
             <a:off x="8243024" y="2063392"/>
-            <a:ext cx="1188720" cy="310000"/>
+            <a:ext cx="800976" cy="310000"/>
           </a:xfrm>
           <a:prstGeom prst="rect">
             <a:avLst/>
@@ -6545,7 +6545,7 @@
         <p:spPr>
           <a:xfrm>
             <a:off x="8243024" y="2483392"/>
-            <a:ext cx="1188720" cy="460000"/>
+            <a:ext cx="800976" cy="460000"/>
           </a:xfrm>
           <a:prstGeom prst="rect">
             <a:avLst/>
@@ -7170,7 +7170,7 @@
         <p:spPr>
           <a:xfrm>
             <a:off x="256032" y="948368"/>
-            <a:ext cx="4160520" cy="1060000"/>
+            <a:ext cx="4160520" cy="865000"/>
           </a:xfrm>
           <a:prstGeom prst="rect">
             <a:avLst/>
@@ -7215,7 +7215,7 @@
         <p:spPr>
           <a:xfrm>
             <a:off x="256032" y="948368"/>
-            <a:ext cx="45000" cy="1060000"/>
+            <a:ext cx="45000" cy="865000"/>
           </a:xfrm>
           <a:prstGeom prst="rect">
             <a:avLst/>
@@ -7257,8 +7257,8 @@
         </p:nvSpPr>
         <p:spPr>
           <a:xfrm>
-            <a:off x="331032" y="998368"/>
-            <a:ext cx="4060520" cy="270000"/>
+            <a:off x="331032" y="988368"/>
+            <a:ext cx="4060520" cy="240000"/>
           </a:xfrm>
           <a:prstGeom prst="rect">
             <a:avLst/>
@@ -7273,7 +7273,7 @@
           <a:p>
             <a:pPr algn="l"/>
             <a:r>
-              <a:rPr sz="900" b="1">
+              <a:rPr sz="850" b="1">
                 <a:solidFill>
                   <a:srgbClr val="EE2222"/>
                 </a:solidFill>
@@ -7292,8 +7292,8 @@
         </p:nvSpPr>
         <p:spPr>
           <a:xfrm>
-            <a:off x="331032" y="1268368"/>
-            <a:ext cx="4060520" cy="670000"/>
+            <a:off x="331032" y="1238368"/>
+            <a:ext cx="4060520" cy="540000"/>
           </a:xfrm>
           <a:prstGeom prst="rect">
             <a:avLst/>
@@ -7329,8 +7329,8 @@
         </p:nvSpPr>
         <p:spPr>
           <a:xfrm>
-            <a:off x="256032" y="2073368"/>
-            <a:ext cx="4160520" cy="1060000"/>
+            <a:off x="256032" y="1828368"/>
+            <a:ext cx="4160520" cy="865000"/>
           </a:xfrm>
           <a:prstGeom prst="rect">
             <a:avLst/>
@@ -7374,8 +7374,8 @@
         </p:nvSpPr>
         <p:spPr>
           <a:xfrm>
-            <a:off x="256032" y="2073368"/>
-            <a:ext cx="45000" cy="1060000"/>
+            <a:off x="256032" y="1828368"/>
+            <a:ext cx="45000" cy="865000"/>
           </a:xfrm>
           <a:prstGeom prst="rect">
             <a:avLst/>
@@ -7417,8 +7417,8 @@
         </p:nvSpPr>
         <p:spPr>
           <a:xfrm>
-            <a:off x="331032" y="2123368"/>
-            <a:ext cx="4060520" cy="270000"/>
+            <a:off x="331032" y="1868368"/>
+            <a:ext cx="4060520" cy="240000"/>
           </a:xfrm>
           <a:prstGeom prst="rect">
             <a:avLst/>
@@ -7433,7 +7433,7 @@
           <a:p>
             <a:pPr algn="l"/>
             <a:r>
-              <a:rPr sz="900" b="1">
+              <a:rPr sz="850" b="1">
                 <a:solidFill>
                   <a:srgbClr val="CC1111"/>
                 </a:solidFill>
@@ -7452,8 +7452,8 @@
         </p:nvSpPr>
         <p:spPr>
           <a:xfrm>
-            <a:off x="331032" y="2393368"/>
-            <a:ext cx="4060520" cy="670000"/>
+            <a:off x="331032" y="2118368"/>
+            <a:ext cx="4060520" cy="540000"/>
           </a:xfrm>
           <a:prstGeom prst="rect">
             <a:avLst/>
@@ -7489,8 +7489,8 @@
         </p:nvSpPr>
         <p:spPr>
           <a:xfrm>
-            <a:off x="256032" y="3198368"/>
-            <a:ext cx="4160520" cy="1060000"/>
+            <a:off x="256032" y="2708368"/>
+            <a:ext cx="4160520" cy="865000"/>
           </a:xfrm>
           <a:prstGeom prst="rect">
             <a:avLst/>
@@ -7534,8 +7534,8 @@
         </p:nvSpPr>
         <p:spPr>
           <a:xfrm>
-            <a:off x="256032" y="3198368"/>
-            <a:ext cx="45000" cy="1060000"/>
+            <a:off x="256032" y="2708368"/>
+            <a:ext cx="45000" cy="865000"/>
           </a:xfrm>
           <a:prstGeom prst="rect">
             <a:avLst/>
@@ -7577,8 +7577,8 @@
         </p:nvSpPr>
         <p:spPr>
           <a:xfrm>
-            <a:off x="331032" y="3248368"/>
-            <a:ext cx="4060520" cy="270000"/>
+            <a:off x="331032" y="2748368"/>
+            <a:ext cx="4060520" cy="240000"/>
           </a:xfrm>
           <a:prstGeom prst="rect">
             <a:avLst/>
@@ -7593,7 +7593,7 @@
           <a:p>
             <a:pPr algn="l"/>
             <a:r>
-              <a:rPr sz="900" b="1">
+              <a:rPr sz="850" b="1">
                 <a:solidFill>
                   <a:srgbClr val="FF6600"/>
                 </a:solidFill>
@@ -7612,8 +7612,8 @@
         </p:nvSpPr>
         <p:spPr>
           <a:xfrm>
-            <a:off x="331032" y="3518368"/>
-            <a:ext cx="4060520" cy="670000"/>
+            <a:off x="331032" y="2998368"/>
+            <a:ext cx="4060520" cy="540000"/>
           </a:xfrm>
           <a:prstGeom prst="rect">
             <a:avLst/>
@@ -7649,8 +7649,8 @@
         </p:nvSpPr>
         <p:spPr>
           <a:xfrm>
-            <a:off x="256032" y="4323368"/>
-            <a:ext cx="4160520" cy="1060000"/>
+            <a:off x="256032" y="3588368"/>
+            <a:ext cx="4160520" cy="865000"/>
           </a:xfrm>
           <a:prstGeom prst="rect">
             <a:avLst/>
@@ -7694,8 +7694,8 @@
         </p:nvSpPr>
         <p:spPr>
           <a:xfrm>
-            <a:off x="256032" y="4323368"/>
-            <a:ext cx="45000" cy="1060000"/>
+            <a:off x="256032" y="3588368"/>
+            <a:ext cx="45000" cy="865000"/>
           </a:xfrm>
           <a:prstGeom prst="rect">
             <a:avLst/>
@@ -7737,8 +7737,8 @@
         </p:nvSpPr>
         <p:spPr>
           <a:xfrm>
-            <a:off x="331032" y="4373368"/>
-            <a:ext cx="4060520" cy="270000"/>
+            <a:off x="331032" y="3628368"/>
+            <a:ext cx="4060520" cy="240000"/>
           </a:xfrm>
           <a:prstGeom prst="rect">
             <a:avLst/>
@@ -7753,7 +7753,7 @@
           <a:p>
             <a:pPr algn="l"/>
             <a:r>
-              <a:rPr sz="900" b="1">
+              <a:rPr sz="850" b="1">
                 <a:solidFill>
                   <a:srgbClr val="22CCDD"/>
                 </a:solidFill>
@@ -7772,8 +7772,8 @@
         </p:nvSpPr>
         <p:spPr>
           <a:xfrm>
-            <a:off x="331032" y="4643368"/>
-            <a:ext cx="4060520" cy="670000"/>
+            <a:off x="331032" y="3878368"/>
+            <a:ext cx="4060520" cy="540000"/>
           </a:xfrm>
           <a:prstGeom prst="rect">
             <a:avLst/>
@@ -8652,7 +8652,7 @@
         <p:spPr>
           <a:xfrm>
             <a:off x="4572000" y="3718368"/>
-            <a:ext cx="4297680" cy="750000"/>
+            <a:ext cx="4297680" cy="743904"/>
           </a:xfrm>
           <a:prstGeom prst="rect">
             <a:avLst/>
@@ -8697,7 +8697,7 @@
         <p:spPr>
           <a:xfrm>
             <a:off x="4632000" y="3768368"/>
-            <a:ext cx="4217680" cy="230000"/>
+            <a:ext cx="4217680" cy="200000"/>
           </a:xfrm>
           <a:prstGeom prst="rect">
             <a:avLst/>
@@ -8731,8 +8731,8 @@
         </p:nvSpPr>
         <p:spPr>
           <a:xfrm>
-            <a:off x="4632000" y="3998368"/>
-            <a:ext cx="4217680" cy="400000"/>
+            <a:off x="4632000" y="3978368"/>
+            <a:ext cx="4217680" cy="320000"/>
           </a:xfrm>
           <a:prstGeom prst="rect">
             <a:avLst/>
@@ -8753,34 +8753,100 @@
                 </a:solidFill>
                 <a:latin typeface="メイリオ"/>
               </a:rPr>
-              <a:t>設定変更時・CZorAT終了時にモード再抽選。
-通常時のレア役でモード昇格を抽選（CZ/AT非当選時のみ）。
-状態はCZかAT当選まで転落なし。</a:t>
-            </a:r>
-          </a:p>
-        </p:txBody>
-      </p:sp>
-      <p:sp>
-        <p:nvSpPr>
-          <p:cNvPr id="51" name="Rectangle 50"/>
+              <a:t>設定変更時・AT終了時にモード再抽選。レア役でモード昇格抽選。</a:t>
+            </a:r>
+          </a:p>
+        </p:txBody>
+      </p:sp>
+      <p:sp>
+        <p:nvSpPr>
+          <p:cNvPr id="51" name="TextBox 50"/>
+          <p:cNvSpPr txBox="1"/>
+          <p:nvPr/>
+        </p:nvSpPr>
+        <p:spPr>
+          <a:xfrm>
+            <a:off x="4632000" y="4308368"/>
+            <a:ext cx="4217680" cy="200000"/>
+          </a:xfrm>
+          <a:prstGeom prst="rect">
+            <a:avLst/>
+          </a:prstGeom>
+          <a:noFill/>
+        </p:spPr>
+        <p:txBody>
+          <a:bodyPr wrap="square">
+            <a:spAutoFit/>
+          </a:bodyPr>
+          <a:lstStyle/>
+          <a:p>
+            <a:pPr algn="l"/>
+            <a:r>
+              <a:rPr sz="750" b="1">
+                <a:solidFill>
+                  <a:srgbClr val="FF6600"/>
+                </a:solidFill>
+                <a:latin typeface="メイリオ"/>
+              </a:rPr>
+              <a:t>CZ抽選対象役：ベル3連・スイカ・チェリー・チャンス目</a:t>
+            </a:r>
+          </a:p>
+        </p:txBody>
+      </p:sp>
+      <p:sp>
+        <p:nvSpPr>
+          <p:cNvPr id="52" name="TextBox 51"/>
+          <p:cNvSpPr txBox="1"/>
+          <p:nvPr/>
+        </p:nvSpPr>
+        <p:spPr>
+          <a:xfrm>
+            <a:off x="6400800" y="4919472"/>
+            <a:ext cx="2651760" cy="180000"/>
+          </a:xfrm>
+          <a:prstGeom prst="rect">
+            <a:avLst/>
+          </a:prstGeom>
+          <a:noFill/>
+        </p:spPr>
+        <p:txBody>
+          <a:bodyPr wrap="square">
+            <a:spAutoFit/>
+          </a:bodyPr>
+          <a:lstStyle/>
+          <a:p>
+            <a:pPr algn="r"/>
+            <a:r>
+              <a:rPr sz="650" b="0">
+                <a:solidFill>
+                  <a:srgbClr val="998880"/>
+                </a:solidFill>
+                <a:latin typeface="メイリオ"/>
+              </a:rPr>
+              <a:t>※ネット解析情報より（ちょんぼりすた・一撃・なな徹・アミュタメ）</a:t>
+            </a:r>
+          </a:p>
+        </p:txBody>
+      </p:sp>
+      <p:sp>
+        <p:nvSpPr>
+          <p:cNvPr id="53" name="Rectangle 52"/>
           <p:cNvSpPr/>
           <p:nvPr/>
         </p:nvSpPr>
         <p:spPr>
           <a:xfrm>
-            <a:off x="4572000" y="4488368"/>
-            <a:ext cx="4297680" cy="590000"/>
-          </a:xfrm>
-          <a:prstGeom prst="rect">
-            <a:avLst/>
-          </a:prstGeom>
-          <a:solidFill>
-            <a:srgbClr val="1A0606"/>
-          </a:solidFill>
-          <a:ln w="15240">
-            <a:solidFill>
-              <a:srgbClr val="FF6600"/>
-            </a:solidFill>
+            <a:off x="0" y="4645152"/>
+            <a:ext cx="9144000" cy="498348"/>
+          </a:xfrm>
+          <a:prstGeom prst="rect">
+            <a:avLst/>
+          </a:prstGeom>
+          <a:solidFill>
+            <a:srgbClr val="0E0404"/>
+          </a:solidFill>
+          <a:ln>
+            <a:noFill/>
           </a:ln>
         </p:spPr>
         <p:style>
@@ -8807,125 +8873,20 @@
       </p:sp>
       <p:sp>
         <p:nvSpPr>
-          <p:cNvPr id="52" name="TextBox 51"/>
-          <p:cNvSpPr txBox="1"/>
-          <p:nvPr/>
-        </p:nvSpPr>
-        <p:spPr>
-          <a:xfrm>
-            <a:off x="4632000" y="4538368"/>
-            <a:ext cx="4217680" cy="220000"/>
-          </a:xfrm>
-          <a:prstGeom prst="rect">
-            <a:avLst/>
-          </a:prstGeom>
-          <a:noFill/>
-        </p:spPr>
-        <p:txBody>
-          <a:bodyPr wrap="square">
-            <a:spAutoFit/>
-          </a:bodyPr>
-          <a:lstStyle/>
-          <a:p>
-            <a:pPr algn="l"/>
-            <a:r>
-              <a:rPr sz="800" b="1">
-                <a:solidFill>
-                  <a:srgbClr val="FF6600"/>
-                </a:solidFill>
-                <a:latin typeface="メイリオ"/>
-              </a:rPr>
-              <a:t>チャンス役：ベル3連・スイカ・チェリー・チャンス目がCZ抽選対象</a:t>
-            </a:r>
-          </a:p>
-        </p:txBody>
-      </p:sp>
-      <p:sp>
-        <p:nvSpPr>
-          <p:cNvPr id="53" name="TextBox 52"/>
-          <p:cNvSpPr txBox="1"/>
-          <p:nvPr/>
-        </p:nvSpPr>
-        <p:spPr>
-          <a:xfrm>
-            <a:off x="4632000" y="4768368"/>
-            <a:ext cx="4217680" cy="280000"/>
-          </a:xfrm>
-          <a:prstGeom prst="rect">
-            <a:avLst/>
-          </a:prstGeom>
-          <a:noFill/>
-        </p:spPr>
-        <p:txBody>
-          <a:bodyPr wrap="square">
-            <a:spAutoFit/>
-          </a:bodyPr>
-          <a:lstStyle/>
-          <a:p>
-            <a:pPr algn="l"/>
-            <a:r>
-              <a:rPr sz="750" b="0">
-                <a:solidFill>
-                  <a:srgbClr val="998880"/>
-                </a:solidFill>
-                <a:latin typeface="メイリオ"/>
-              </a:rPr>
-              <a:t>ベル・リプレイ3連以上はモードに応じてCZ抽選。レア役はより高確率でCZ/AT直撃を抽選。</a:t>
-            </a:r>
-          </a:p>
-        </p:txBody>
-      </p:sp>
-      <p:sp>
-        <p:nvSpPr>
-          <p:cNvPr id="54" name="TextBox 53"/>
-          <p:cNvSpPr txBox="1"/>
-          <p:nvPr/>
-        </p:nvSpPr>
-        <p:spPr>
-          <a:xfrm>
-            <a:off x="6400800" y="4919472"/>
-            <a:ext cx="2651760" cy="180000"/>
-          </a:xfrm>
-          <a:prstGeom prst="rect">
-            <a:avLst/>
-          </a:prstGeom>
-          <a:noFill/>
-        </p:spPr>
-        <p:txBody>
-          <a:bodyPr wrap="square">
-            <a:spAutoFit/>
-          </a:bodyPr>
-          <a:lstStyle/>
-          <a:p>
-            <a:pPr algn="r"/>
-            <a:r>
-              <a:rPr sz="650" b="0">
-                <a:solidFill>
-                  <a:srgbClr val="998880"/>
-                </a:solidFill>
-                <a:latin typeface="メイリオ"/>
-              </a:rPr>
-              <a:t>※ネット解析情報より（ちょんぼりすた・一撃・なな徹・アミュタメ）</a:t>
-            </a:r>
-          </a:p>
-        </p:txBody>
-      </p:sp>
-      <p:sp>
-        <p:nvSpPr>
-          <p:cNvPr id="55" name="Rectangle 54"/>
+          <p:cNvPr id="54" name="Rectangle 53"/>
           <p:cNvSpPr/>
           <p:nvPr/>
         </p:nvSpPr>
         <p:spPr>
           <a:xfrm>
             <a:off x="0" y="4645152"/>
-            <a:ext cx="9144000" cy="498348"/>
-          </a:xfrm>
-          <a:prstGeom prst="rect">
-            <a:avLst/>
-          </a:prstGeom>
-          <a:solidFill>
-            <a:srgbClr val="0E0404"/>
+            <a:ext cx="20000" cy="498348"/>
+          </a:xfrm>
+          <a:prstGeom prst="rect">
+            <a:avLst/>
+          </a:prstGeom>
+          <a:solidFill>
+            <a:srgbClr val="CC1111"/>
           </a:solidFill>
           <a:ln>
             <a:noFill/>
@@ -8955,50 +8916,7 @@
       </p:sp>
       <p:sp>
         <p:nvSpPr>
-          <p:cNvPr id="56" name="Rectangle 55"/>
-          <p:cNvSpPr/>
-          <p:nvPr/>
-        </p:nvSpPr>
-        <p:spPr>
-          <a:xfrm>
-            <a:off x="0" y="4645152"/>
-            <a:ext cx="20000" cy="498348"/>
-          </a:xfrm>
-          <a:prstGeom prst="rect">
-            <a:avLst/>
-          </a:prstGeom>
-          <a:solidFill>
-            <a:srgbClr val="CC1111"/>
-          </a:solidFill>
-          <a:ln>
-            <a:noFill/>
-          </a:ln>
-        </p:spPr>
-        <p:style>
-          <a:lnRef idx="1">
-            <a:schemeClr val="accent1"/>
-          </a:lnRef>
-          <a:fillRef idx="3">
-            <a:schemeClr val="accent1"/>
-          </a:fillRef>
-          <a:effectRef idx="2">
-            <a:schemeClr val="accent1"/>
-          </a:effectRef>
-          <a:fontRef idx="minor">
-            <a:schemeClr val="lt1"/>
-          </a:fontRef>
-        </p:style>
-        <p:txBody>
-          <a:bodyPr rtlCol="0" anchor="ctr"/>
-          <a:lstStyle/>
-          <a:p>
-            <a:pPr algn="ctr"/>
-          </a:p>
-        </p:txBody>
-      </p:sp>
-      <p:sp>
-        <p:nvSpPr>
-          <p:cNvPr id="57" name="TextBox 56"/>
+          <p:cNvPr id="55" name="TextBox 54"/>
           <p:cNvSpPr txBox="1"/>
           <p:nvPr/>
         </p:nvSpPr>
@@ -9033,7 +8951,7 @@
       </p:sp>
       <p:sp>
         <p:nvSpPr>
-          <p:cNvPr id="58" name="TextBox 57"/>
+          <p:cNvPr id="56" name="TextBox 55"/>
           <p:cNvSpPr txBox="1"/>
           <p:nvPr/>
         </p:nvSpPr>
